--- a/dist/초4/영어/이해와상호작용/초4_영어_이해와상호작용_01_가족소개하기.pptx
+++ b/dist/초4/영어/이해와상호작용/초4_영어_이해와상호작용_01_가족소개하기.pptx
@@ -121,13 +121,13 @@
   <p:extLst>
     <p:ext uri="{521415D9-36F7-43E2-AB2F-B90AF26B5E84}">
       <p14:sectionLst xmlns:p14="http://schemas.microsoft.com/office/powerpoint/2010/main">
-        <p14:section name="도입" id="{56473bc8-e960-ec68-8b1d-06bcceecb777}">
+        <p14:section name="도입" id="{ececfcd7-bf0f-e9f4-8345-ac9e82a8cfb2}">
           <p14:sldIdLst>
             <p14:sldId id="256"/>
             <p14:sldId id="257"/>
           </p14:sldIdLst>
         </p14:section>
-        <p14:section name="개념" id="{1eb21be6-b003-b062-98f4-c6da041b12ce}">
+        <p14:section name="개념" id="{d5e703c3-1317-d14a-c472-39146adaf9ab}">
           <p14:sldIdLst>
             <p14:sldId id="258"/>
             <p14:sldId id="259"/>
@@ -135,7 +135,7 @@
             <p14:sldId id="262"/>
           </p14:sldIdLst>
         </p14:section>
-        <p14:section name="연습" id="{628b58f3-3cab-dbb8-20bd-79d1a66b90d9}">
+        <p14:section name="연습" id="{b90a548a-ab94-5c81-723f-e5210538c031}">
           <p14:sldIdLst>
             <p14:sldId id="260"/>
             <p14:sldId id="263"/>
@@ -143,25 +143,25 @@
             <p14:sldId id="265"/>
           </p14:sldIdLst>
         </p14:section>
-        <p14:section name="개념" id="{6c66acfe-a7ff-415b-1a86-010e3eb85499}">
+        <p14:section name="개념" id="{20422c87-5712-78fe-1ad2-e0befa57aeb8}">
           <p14:sldIdLst/>
         </p14:section>
-        <p14:section name="연습" id="{b016a958-1ace-85cc-c9d7-0d575ee658d2}">
+        <p14:section name="연습" id="{f3dc9e43-98c7-d578-31b6-aedf80fc603d}">
           <p14:sldIdLst/>
         </p14:section>
-        <p14:section name="확인" id="{f5c71bd8-2e47-637c-5645-f2a3214d799a}">
+        <p14:section name="확인" id="{4d900abe-f3aa-6474-7f83-b44270f921ce}">
           <p14:sldIdLst>
             <p14:sldId id="266"/>
             <p14:sldId id="267"/>
             <p14:sldId id="268"/>
           </p14:sldIdLst>
         </p14:section>
-        <p14:section name="정리" id="{cbde9d25-557a-28c3-a3d7-82d741876c42}">
+        <p14:section name="정리" id="{c651fa67-fdc6-ae8a-913d-17509670e080}">
           <p14:sldIdLst>
             <p14:sldId id="269"/>
           </p14:sldIdLst>
         </p14:section>
-        <p14:section name="보충" id="{e7c682a4-5c2b-47fd-4d9f-78310e11f06f}">
+        <p14:section name="보충" id="{d714a56d-1d80-6b82-054a-0f6fb074c5ba}">
           <p14:sldIdLst>
             <p14:sldId id="270"/>
           </p14:sldIdLst>

--- a/dist/초4/영어/이해와상호작용/초4_영어_이해와상호작용_01_가족소개하기.pptx
+++ b/dist/초4/영어/이해와상호작용/초4_영어_이해와상호작용_01_가족소개하기.pptx
@@ -121,13 +121,13 @@
   <p:extLst>
     <p:ext uri="{521415D9-36F7-43E2-AB2F-B90AF26B5E84}">
       <p14:sectionLst xmlns:p14="http://schemas.microsoft.com/office/powerpoint/2010/main">
-        <p14:section name="도입" id="{ececfcd7-bf0f-e9f4-8345-ac9e82a8cfb2}">
+        <p14:section name="도입" id="{4ed8a7e5-8f52-b269-2a29-b48a5dc8c945}">
           <p14:sldIdLst>
             <p14:sldId id="256"/>
             <p14:sldId id="257"/>
           </p14:sldIdLst>
         </p14:section>
-        <p14:section name="개념" id="{d5e703c3-1317-d14a-c472-39146adaf9ab}">
+        <p14:section name="개념" id="{6e0fb5d3-02fe-0994-ea16-843618da4c21}">
           <p14:sldIdLst>
             <p14:sldId id="258"/>
             <p14:sldId id="259"/>
@@ -135,7 +135,7 @@
             <p14:sldId id="262"/>
           </p14:sldIdLst>
         </p14:section>
-        <p14:section name="연습" id="{b90a548a-ab94-5c81-723f-e5210538c031}">
+        <p14:section name="연습" id="{f598222e-ef00-00b0-fbe8-f7dfd114372b}">
           <p14:sldIdLst>
             <p14:sldId id="260"/>
             <p14:sldId id="263"/>
@@ -143,25 +143,25 @@
             <p14:sldId id="265"/>
           </p14:sldIdLst>
         </p14:section>
-        <p14:section name="개념" id="{20422c87-5712-78fe-1ad2-e0befa57aeb8}">
+        <p14:section name="개념" id="{eef71f4d-f8c4-5df5-ae27-3031a5b184d6}">
           <p14:sldIdLst/>
         </p14:section>
-        <p14:section name="연습" id="{f3dc9e43-98c7-d578-31b6-aedf80fc603d}">
+        <p14:section name="연습" id="{97d6f4ae-9da1-0caf-6abb-94376af3acb2}">
           <p14:sldIdLst/>
         </p14:section>
-        <p14:section name="확인" id="{4d900abe-f3aa-6474-7f83-b44270f921ce}">
+        <p14:section name="확인" id="{f8f951f3-02b9-06a3-2c55-024f8139f9e9}">
           <p14:sldIdLst>
             <p14:sldId id="266"/>
             <p14:sldId id="267"/>
             <p14:sldId id="268"/>
           </p14:sldIdLst>
         </p14:section>
-        <p14:section name="정리" id="{c651fa67-fdc6-ae8a-913d-17509670e080}">
+        <p14:section name="정리" id="{37295468-a73d-be1c-7f84-55e60b52b241}">
           <p14:sldIdLst>
             <p14:sldId id="269"/>
           </p14:sldIdLst>
         </p14:section>
-        <p14:section name="보충" id="{d714a56d-1d80-6b82-054a-0f6fb074c5ba}">
+        <p14:section name="보충" id="{0978f228-27e7-0e2c-a50e-73b94c72130e}">
           <p14:sldIdLst>
             <p14:sldId id="270"/>
           </p14:sldIdLst>
@@ -1179,7 +1179,7 @@
 막히면
 - 부모가 먼저 말하고 아이가 따라 말하는 것부터 다시 합니다.
 주의
-- 이 차시는 계획상 바로 앞 차시가 없습니다. 보충 뒤에도 자기 이름을 넣어 말하지 못하면 3학년 ‘이름 묻고 답하기’(KR22-G03-ENG-NAME-L01)를, 짧은 문장을 읽지 못하면 ‘짧은 문장 읽고 쓰기’(KR22-G04-ENG-ILIKE-L01)를 먼저 다시 하고 이 차시를 시작합니다.</a:t>
+- 보충 뒤에도 자기 이름을 넣어 말하지 못하면 3학년 ‘이름 묻고 답하기’(KR22-G03-ENG-NAME-L01)를, 짧은 문장을 읽지 못하면 ‘짧은 문장 읽고 쓰기’(KR22-G04-ENG-ILIKE-L01)를 먼저 다시 하고 이 차시를 시작합니다.</a:t>
             </a:r>
             <a:endParaRPr lang="en-US" dirty="0"/>
           </a:p>
@@ -1268,7 +1268,7 @@
             <a:r>
               <a:rPr lang="en-US" dirty="0"/>
               <a:t>[S02 · 선수 학습 확인(나를 소개하는 말, 짧은 문장 읽기)]
-목적: 3학년 ‘이름 묻고 답하기’에서 배운 나를 소개하는 말과, 지난 차시 ‘짧은 문장 읽고 쓰기’의 문장 읽기를 확인합니다. 이 차시는 계획상 바로 앞 차시가 없지만, 나를 소개하는 말을 가족 소개로 넓히므로 꼭 필요합니다.
+목적: 3학년 ‘이름 묻고 답하기’에서 배운 나를 소개하는 말과, 지난 차시 ‘짧은 문장 읽고 쓰기’의 문장 읽기를 확인합니다. 나를 소개하는 말을 가족 소개로 넓히므로 꼭 필요합니다.
 시간: 약 3분
 이렇게 말해 보세요
 - “①, What's your name?”
